--- a/decks/hist-williams-control/hist-williams-control_ch3_rebellion-and-terror.pptx
+++ b/decks/hist-williams-control/hist-williams-control_ch3_rebellion-and-terror.pptx
@@ -127,31 +127,31 @@
   <p:extLst>
     <p:ext uri="{521415D9-36F7-43E2-AB2F-B90AF26B5E84}">
       <p14:sectionLst xmlns:p14="http://schemas.microsoft.com/office/powerpoint/2010/main">
-        <p14:section name="Opening" id="{cbc60ee9-b4f8-f6e9-b3ab-046461037834}">
+        <p14:section name="Opening" id="{e96d1b56-19f2-b280-ae7a-ff74a703fd8b}">
           <p14:sldIdLst>
             <p14:sldId id="256"/>
           </p14:sldIdLst>
         </p14:section>
-        <p14:section name="Gate" id="{bc08bf0b-7096-3728-7d1b-804d7344c407}">
+        <p14:section name="Gate" id="{d04da004-1a6d-05a1-ea09-33ad304fa4eb}">
           <p14:sldIdLst>
             <p14:sldId id="257"/>
             <p14:sldId id="258"/>
             <p14:sldId id="259"/>
           </p14:sldIdLst>
         </p14:section>
-        <p14:section name="Pre-teach" id="{ea720fc2-3e48-d866-0390-52b9d2ad2b0d}">
+        <p14:section name="Pre-teach" id="{34a4d36d-8191-8210-df8e-80a32f9d008e}">
           <p14:sldIdLst>
             <p14:sldId id="260"/>
             <p14:sldId id="261"/>
           </p14:sldIdLst>
         </p14:section>
-        <p14:section name="Read-along" id="{b8a37d11-5ba3-6660-b0dc-9752dc760d7d}">
+        <p14:section name="Read-along" id="{229d63e7-d45d-6bfa-d577-082d09bb3819}">
           <p14:sldIdLst>
             <p14:sldId id="262"/>
             <p14:sldId id="263"/>
           </p14:sldIdLst>
         </p14:section>
-        <p14:section name="Teach" id="{6225f65d-3065-285f-0ab2-063163120b77}">
+        <p14:section name="Teach" id="{ad35d5df-4d06-14ae-61bb-4f539de5f5db}">
           <p14:sldIdLst>
             <p14:sldId id="264"/>
             <p14:sldId id="265"/>
@@ -160,7 +160,7 @@
             <p14:sldId id="268"/>
           </p14:sldIdLst>
         </p14:section>
-        <p14:section name="Routes" id="{dfc6e678-cfce-9378-8858-1edbfb0a76a5}">
+        <p14:section name="Routes" id="{0e407878-df82-e23a-1491-77d89dabb191}">
           <p14:sldIdLst>
             <p14:sldId id="269"/>
             <p14:sldId id="270"/>
@@ -168,12 +168,12 @@
             <p14:sldId id="272"/>
           </p14:sldIdLst>
         </p14:section>
-        <p14:section name="Close" id="{ce9e3fe8-8efa-690f-d06e-f0f9454a9919}">
+        <p14:section name="Close" id="{afdc36aa-e9d1-3248-b6c2-624880a9c09a}">
           <p14:sldIdLst>
             <p14:sldId id="273"/>
           </p14:sldIdLst>
         </p14:section>
-        <p14:section name="Answers" id="{0aaee335-d69a-94db-b7a4-9bef3b37cf8f}">
+        <p14:section name="Answers" id="{28b6903d-afd5-15d6-085a-4ef49e16b1cb}">
           <p14:sldIdLst>
             <p14:sldId id="274"/>
             <p14:sldId id="275"/>
@@ -768,7 +768,7 @@
             <a:r>
               <a:rPr lang="en-US" dirty="0"/>
               <a:t>Teach — The Harrying of the North, 1069–70. Say it in your own words, then check understanding with a quick question: ask a pupil from the pre-teach group first, since they met these words and ideas before the lesson. Pupils try to recall before you re-explain.
-William did not have enough soldiers to control the North all the time. So in the winter of 1069 to 1070 he chose terror. His army laid waste the whole region north of the River Humber: crops and herds, tools and food of every kind were burned. Villages were destroyed. The aim was that the land could no longer give shelter or food to his enemies, so that rebellion became impossible. This is the Harrying of the North.
+There were never enough Norman soldiers to hold the North down month after month. So in the winter of 1069 to 1070 he chose terror. His army laid waste the whole region north of the River Humber: crops and herds, tools and food of every kind were burned. Villages were destroyed. The aim was that the land could no longer give shelter or food to his enemies, so that rebellion became impossible. This is the Harrying of the North.
 The result was famine. With the harvest burned and the animals killed, people starved through the winter. A writer of the time believed that more than one hundred thousand people died of hunger, the innocent along with the guilty. The next chapter looks closely at what that writer and a Norman writer said about it.
 Why did William think this was necessary? The North had rebelled repeatedly and had joined with the Danes. He could not station an army there for ever. Destroying the food made another rising impossible for years. Whether that made it right is a different question, and one you will be asked to judge.
 Worked example — model it step by step, thinking aloud: Explain one reason why William used terror in the North in 1069–70. (1) Point: One reason William used terror was that he did not have enough soldiers to control the North all the time. (2) Evidence: the North had rebelled in 1069 with Danish support, after Robert de Comines and his men had been killed at Durham. (3) Explain: because he could not leave an army there for ever, burning the crops and food meant the rebels could not feed another army. (4) Finish: so the Harrying was meant to end rebellion for good, not just to win one more battle. Answer: Point, evidence, explain: too few soldiers; repeated rebellion with Danish help; so burning the food made future rebellion impossible..</a:t>
@@ -860,7 +860,7 @@
             <a:r>
               <a:rPr lang="en-US" dirty="0"/>
               <a:t>Teach — The Harrying of the North, 1069–70. Say it in your own words, then check understanding with a quick question: ask a pupil from the pre-teach group first, since they met these words and ideas before the lesson. Pupils try to recall before you re-explain.
-William did not have enough soldiers to control the North all the time. So in the winter of 1069 to 1070 he chose terror. His army laid waste the whole region north of the River Humber: crops and herds, tools and food of every kind were burned. Villages were destroyed. The aim was that the land could no longer give shelter or food to his enemies, so that rebellion became impossible. This is the Harrying of the North.
+There were never enough Norman soldiers to hold the North down month after month. So in the winter of 1069 to 1070 he chose terror. His army laid waste the whole region north of the River Humber: crops and herds, tools and food of every kind were burned. Villages were destroyed. The aim was that the land could no longer give shelter or food to his enemies, so that rebellion became impossible. This is the Harrying of the North.
 The result was famine. With the harvest burned and the animals killed, people starved through the winter. A writer of the time believed that more than one hundred thousand people died of hunger, the innocent along with the guilty. The next chapter looks closely at what that writer and a Norman writer said about it.
 Why did William think this was necessary? The North had rebelled repeatedly and had joined with the Danes. He could not station an army there for ever. Destroying the food made another rising impossible for years. Whether that made it right is a different question, and one you will be asked to judge.
 Worked example — model it step by step, thinking aloud: Explain one reason why William used terror in the North in 1069–70. (1) Point: One reason William used terror was that he did not have enough soldiers to control the North all the time. (2) Evidence: the North had rebelled in 1069 with Danish support, after Robert de Comines and his men had been killed at Durham. (3) Explain: because he could not leave an army there for ever, burning the crops and food meant the rebels could not feed another army. (4) Finish: so the Harrying was meant to end rebellion for good, not just to win one more battle. Answer: Point, evidence, explain: too few soldiers; repeated rebellion with Danish help; so burning the food made future rebellion impossible..</a:t>
@@ -2350,7 +2350,7 @@
 Key words are in bold: pause on each and ask for its meaning.
 Sentences 8–13 of 13:
 8. Later in 1069 the North rose again, helped by the Danes.
-9. William did not have enough soldiers to control the North all the time.
+9. There were never enough Norman soldiers to hold the North down all the time.
 10. So in the winter of 1069 to 1070 he used terror.
 11. His men burned crops, herds, tools and food across the North.
 12. This is called the Harrying of the North.
@@ -2445,7 +2445,7 @@
               <a:rPr lang="en-US" dirty="0"/>
               <a:t>Teach — The first rebellions, 1067–68. Say it in your own words, then check understanding with a quick question: ask a pupil from the pre-teach group first, since they met these words and ideas before the lesson. Pupils try to recall before you re-explain.
 After securing London and Dover, William controlled the South. He now had to turn to the rebellious English earls of the North and to anyone else who refused to accept him. The first rebellion William faced was led by Eadric the Wild, from 1067 to 1068. In 1068 the family of Harold Godwinson rebelled in Exeter.
-William used all of his military strength to destroy both revolts and end any opposition to his rule. Both were put down. But notice the pattern: each time William's army moved on, somebody else rose up behind it. A country cannot be held by one army marching from place to place.
+William threw his whole army at both risings and crushed them, determined that no one should be left standing against him. Both were put down. But notice the pattern: each time William's army moved on, somebody else rose up behind it. A country cannot be held by one army marching from place to place.
 The deck's Bayeux Tapestry bell work shows Norman soldiers setting fire to an English house. Burning was how a medieval army punished an area, and William had already used it around London. In 1069 he would use it on a far greater scale.
 Tip: Learn the rebellions as a list with dates: Eadric the Wild 1067–68; Exeter 1068; Northumbria 1069. Three rebellions in three years.</a:t>
             </a:r>
@@ -4971,7 +4971,7 @@
                 <a:ea typeface="Calibri" pitchFamily="34" charset="-122"/>
                 <a:cs typeface="Calibri" pitchFamily="34" charset="-120"/>
               </a:rPr>
-              <a:t>William did not have enough soldiers to control the North all the time.</a:t>
+              <a:t>There were never enough Norman soldiers to hold the North down month after month.</a:t>
             </a:r>
             <a:endParaRPr lang="en-US" sz="2400" dirty="0"/>
           </a:p>
@@ -17022,7 +17022,7 @@
                 <a:ea typeface="Calibri" pitchFamily="34" charset="-122"/>
                 <a:cs typeface="Calibri" pitchFamily="34" charset="-120"/>
               </a:rPr>
-              <a:t>William did not have enough soldiers to control the North all the time.</a:t>
+              <a:t>There were never enough Norman soldiers to hold the North down all the time.</a:t>
             </a:r>
             <a:endParaRPr lang="en-US" sz="2400" dirty="0"/>
           </a:p>
@@ -17833,7 +17833,7 @@
                 <a:ea typeface="Calibri" pitchFamily="34" charset="-122"/>
                 <a:cs typeface="Calibri" pitchFamily="34" charset="-120"/>
               </a:rPr>
-              <a:t>William used all of his military strength to destroy both revolts and end any opposition to his rule.</a:t>
+              <a:t>William threw his whole army at both risings and crushed them, determined that no one should be left standing against him.</a:t>
             </a:r>
             <a:endParaRPr lang="en-US" sz="2000" dirty="0"/>
           </a:p>
